--- a/Resources-Notes-Ppts/React/React.pptx
+++ b/Resources-Notes-Ppts/React/React.pptx
@@ -77,13 +77,18 @@
     <p:sldId id="306" r:id="rId71"/>
     <p:sldId id="338" r:id="rId72"/>
     <p:sldId id="340" r:id="rId73"/>
-    <p:sldId id="308" r:id="rId74"/>
-    <p:sldId id="285" r:id="rId75"/>
-    <p:sldId id="290" r:id="rId76"/>
-    <p:sldId id="289" r:id="rId77"/>
-    <p:sldId id="294" r:id="rId78"/>
-    <p:sldId id="298" r:id="rId79"/>
-    <p:sldId id="302" r:id="rId80"/>
+    <p:sldId id="341" r:id="rId74"/>
+    <p:sldId id="342" r:id="rId75"/>
+    <p:sldId id="343" r:id="rId76"/>
+    <p:sldId id="344" r:id="rId77"/>
+    <p:sldId id="345" r:id="rId78"/>
+    <p:sldId id="308" r:id="rId79"/>
+    <p:sldId id="285" r:id="rId80"/>
+    <p:sldId id="290" r:id="rId81"/>
+    <p:sldId id="289" r:id="rId82"/>
+    <p:sldId id="294" r:id="rId83"/>
+    <p:sldId id="298" r:id="rId84"/>
+    <p:sldId id="302" r:id="rId85"/>
   </p:sldIdLst>
   <p:sldSz cx="12192000" cy="6858000"/>
   <p:notesSz cx="6858000" cy="9144000"/>
@@ -2675,7 +2680,7 @@
             <a:fld id="{B61BEF0D-F0BB-DE4B-95CE-6DB70DBA9567}" type="datetimeFigureOut">
               <a:rPr lang="en-US" dirty="0"/>
               <a:pPr/>
-              <a:t>5/18/2026</a:t>
+              <a:t>6/2/2026</a:t>
             </a:fld>
             <a:endParaRPr lang="en-US" dirty="0"/>
           </a:p>
@@ -2937,7 +2942,7 @@
             <a:fld id="{B61BEF0D-F0BB-DE4B-95CE-6DB70DBA9567}" type="datetimeFigureOut">
               <a:rPr lang="en-US" dirty="0"/>
               <a:pPr/>
-              <a:t>5/18/2026</a:t>
+              <a:t>6/2/2026</a:t>
             </a:fld>
             <a:endParaRPr lang="en-US" dirty="0"/>
           </a:p>
@@ -3172,7 +3177,7 @@
             <a:fld id="{B61BEF0D-F0BB-DE4B-95CE-6DB70DBA9567}" type="datetimeFigureOut">
               <a:rPr lang="en-US" dirty="0"/>
               <a:pPr/>
-              <a:t>5/18/2026</a:t>
+              <a:t>6/2/2026</a:t>
             </a:fld>
             <a:endParaRPr lang="en-US" dirty="0"/>
           </a:p>
@@ -3419,7 +3424,7 @@
             <a:fld id="{B61BEF0D-F0BB-DE4B-95CE-6DB70DBA9567}" type="datetimeFigureOut">
               <a:rPr lang="en-US" dirty="0"/>
               <a:pPr/>
-              <a:t>5/18/2026</a:t>
+              <a:t>6/2/2026</a:t>
             </a:fld>
             <a:endParaRPr lang="en-US" dirty="0"/>
           </a:p>
@@ -3727,7 +3732,7 @@
             <a:fld id="{B61BEF0D-F0BB-DE4B-95CE-6DB70DBA9567}" type="datetimeFigureOut">
               <a:rPr lang="en-US" dirty="0"/>
               <a:pPr/>
-              <a:t>5/18/2026</a:t>
+              <a:t>6/2/2026</a:t>
             </a:fld>
             <a:endParaRPr lang="en-US" dirty="0"/>
           </a:p>
@@ -4028,7 +4033,7 @@
             <a:fld id="{B61BEF0D-F0BB-DE4B-95CE-6DB70DBA9567}" type="datetimeFigureOut">
               <a:rPr lang="en-US" dirty="0"/>
               <a:pPr/>
-              <a:t>5/18/2026</a:t>
+              <a:t>6/2/2026</a:t>
             </a:fld>
             <a:endParaRPr lang="en-US" dirty="0"/>
           </a:p>
@@ -4449,7 +4454,7 @@
             <a:fld id="{B61BEF0D-F0BB-DE4B-95CE-6DB70DBA9567}" type="datetimeFigureOut">
               <a:rPr lang="en-US" dirty="0"/>
               <a:pPr/>
-              <a:t>5/18/2026</a:t>
+              <a:t>6/2/2026</a:t>
             </a:fld>
             <a:endParaRPr lang="en-US" dirty="0"/>
           </a:p>
@@ -4612,7 +4617,7 @@
             <a:fld id="{B61BEF0D-F0BB-DE4B-95CE-6DB70DBA9567}" type="datetimeFigureOut">
               <a:rPr lang="en-US" dirty="0"/>
               <a:pPr/>
-              <a:t>5/18/2026</a:t>
+              <a:t>6/2/2026</a:t>
             </a:fld>
             <a:endParaRPr lang="en-US" dirty="0"/>
           </a:p>
@@ -4709,7 +4714,7 @@
             <a:fld id="{B61BEF0D-F0BB-DE4B-95CE-6DB70DBA9567}" type="datetimeFigureOut">
               <a:rPr lang="en-US" dirty="0"/>
               <a:pPr/>
-              <a:t>5/18/2026</a:t>
+              <a:t>6/2/2026</a:t>
             </a:fld>
             <a:endParaRPr lang="en-US" dirty="0"/>
           </a:p>
@@ -5087,7 +5092,7 @@
             <a:fld id="{B61BEF0D-F0BB-DE4B-95CE-6DB70DBA9567}" type="datetimeFigureOut">
               <a:rPr lang="en-US" dirty="0"/>
               <a:pPr/>
-              <a:t>5/18/2026</a:t>
+              <a:t>6/2/2026</a:t>
             </a:fld>
             <a:endParaRPr lang="en-US" dirty="0"/>
           </a:p>
@@ -5373,7 +5378,7 @@
             <a:fld id="{B61BEF0D-F0BB-DE4B-95CE-6DB70DBA9567}" type="datetimeFigureOut">
               <a:rPr lang="en-US" dirty="0"/>
               <a:pPr/>
-              <a:t>5/18/2026</a:t>
+              <a:t>6/2/2026</a:t>
             </a:fld>
             <a:endParaRPr lang="en-US" dirty="0"/>
           </a:p>
@@ -5612,7 +5617,7 @@
             <a:fld id="{B61BEF0D-F0BB-DE4B-95CE-6DB70DBA9567}" type="datetimeFigureOut">
               <a:rPr lang="en-US" dirty="0"/>
               <a:pPr/>
-              <a:t>5/18/2026</a:t>
+              <a:t>6/2/2026</a:t>
             </a:fld>
             <a:endParaRPr lang="en-US" dirty="0"/>
           </a:p>
@@ -19537,10 +19542,10 @@
       </p:sp>
       <p:pic>
         <p:nvPicPr>
-          <p:cNvPr id="12" name="Picture 11">
-            <a:extLst>
-              <a:ext uri="{FF2B5EF4-FFF2-40B4-BE49-F238E27FC236}">
-                <a16:creationId xmlns:a16="http://schemas.microsoft.com/office/drawing/2014/main" id="{E4119121-F91F-9B31-4996-75D1E1621579}"/>
+          <p:cNvPr id="14" name="Picture 13">
+            <a:extLst>
+              <a:ext uri="{FF2B5EF4-FFF2-40B4-BE49-F238E27FC236}">
+                <a16:creationId xmlns:a16="http://schemas.microsoft.com/office/drawing/2014/main" id="{99BF2875-B6BC-9C42-EB6E-C02D9D175DB6}"/>
               </a:ext>
             </a:extLst>
           </p:cNvPr>
@@ -19557,8 +19562,8 @@
         </p:blipFill>
         <p:spPr>
           <a:xfrm>
-            <a:off x="792150" y="2036269"/>
-            <a:ext cx="4163539" cy="4698367"/>
+            <a:off x="7236313" y="2036269"/>
+            <a:ext cx="3927416" cy="4747180"/>
           </a:xfrm>
           <a:prstGeom prst="rect">
             <a:avLst/>
@@ -19567,10 +19572,10 @@
       </p:pic>
       <p:pic>
         <p:nvPicPr>
-          <p:cNvPr id="14" name="Picture 13">
-            <a:extLst>
-              <a:ext uri="{FF2B5EF4-FFF2-40B4-BE49-F238E27FC236}">
-                <a16:creationId xmlns:a16="http://schemas.microsoft.com/office/drawing/2014/main" id="{99BF2875-B6BC-9C42-EB6E-C02D9D175DB6}"/>
+          <p:cNvPr id="16" name="Picture 15">
+            <a:extLst>
+              <a:ext uri="{FF2B5EF4-FFF2-40B4-BE49-F238E27FC236}">
+                <a16:creationId xmlns:a16="http://schemas.microsoft.com/office/drawing/2014/main" id="{5644426E-3D99-477F-872A-5865F96FFA5F}"/>
               </a:ext>
             </a:extLst>
           </p:cNvPr>
@@ -19587,8 +19592,8 @@
         </p:blipFill>
         <p:spPr>
           <a:xfrm>
-            <a:off x="7236313" y="2036269"/>
-            <a:ext cx="3927416" cy="4747180"/>
+            <a:off x="888722" y="1840652"/>
+            <a:ext cx="3927416" cy="4942797"/>
           </a:xfrm>
           <a:prstGeom prst="rect">
             <a:avLst/>
@@ -24108,7 +24113,7 @@
           <a:p>
             <a:r>
               <a:rPr lang="en-US" dirty="0"/>
-              <a:t>2 ways: </a:t>
+              <a:t>Multiple ways: </a:t>
             </a:r>
             <a:r>
               <a:rPr lang="en-US" dirty="0" err="1"/>
@@ -24464,6 +24469,987 @@
 </file>
 
 <file path=ppt/slides/slide73.xml><?xml version="1.0" encoding="utf-8"?>
+<p:sld xmlns:a="http://schemas.openxmlformats.org/drawingml/2006/main" xmlns:r="http://schemas.openxmlformats.org/officeDocument/2006/relationships" xmlns:p="http://schemas.openxmlformats.org/presentationml/2006/main">
+  <p:cSld>
+    <p:spTree>
+      <p:nvGrpSpPr>
+        <p:cNvPr id="1" name=""/>
+        <p:cNvGrpSpPr/>
+        <p:nvPr/>
+      </p:nvGrpSpPr>
+      <p:grpSpPr>
+        <a:xfrm>
+          <a:off x="0" y="0"/>
+          <a:ext cx="0" cy="0"/>
+          <a:chOff x="0" y="0"/>
+          <a:chExt cx="0" cy="0"/>
+        </a:xfrm>
+      </p:grpSpPr>
+      <p:sp>
+        <p:nvSpPr>
+          <p:cNvPr id="2" name="Title 1">
+            <a:extLst>
+              <a:ext uri="{FF2B5EF4-FFF2-40B4-BE49-F238E27FC236}">
+                <a16:creationId xmlns:a16="http://schemas.microsoft.com/office/drawing/2014/main" id="{3BB8483C-6911-4EDC-9E07-CEEF2E80BB0A}"/>
+              </a:ext>
+            </a:extLst>
+          </p:cNvPr>
+          <p:cNvSpPr>
+            <a:spLocks noGrp="1"/>
+          </p:cNvSpPr>
+          <p:nvPr>
+            <p:ph type="title"/>
+          </p:nvPr>
+        </p:nvSpPr>
+        <p:spPr/>
+        <p:txBody>
+          <a:bodyPr/>
+          <a:lstStyle/>
+          <a:p>
+            <a:r>
+              <a:rPr lang="en-US" dirty="0"/>
+              <a:t>Material UI Themes</a:t>
+            </a:r>
+          </a:p>
+        </p:txBody>
+      </p:sp>
+      <p:sp>
+        <p:nvSpPr>
+          <p:cNvPr id="6" name="TextBox 5">
+            <a:extLst>
+              <a:ext uri="{FF2B5EF4-FFF2-40B4-BE49-F238E27FC236}">
+                <a16:creationId xmlns:a16="http://schemas.microsoft.com/office/drawing/2014/main" id="{BC27DA1B-3FCB-7059-8F0B-1F9E74A74D1A}"/>
+              </a:ext>
+            </a:extLst>
+          </p:cNvPr>
+          <p:cNvSpPr txBox="1"/>
+          <p:nvPr/>
+        </p:nvSpPr>
+        <p:spPr>
+          <a:xfrm>
+            <a:off x="1720619" y="1859038"/>
+            <a:ext cx="1503745" cy="369332"/>
+          </a:xfrm>
+          <a:prstGeom prst="rect">
+            <a:avLst/>
+          </a:prstGeom>
+          <a:noFill/>
+        </p:spPr>
+        <p:txBody>
+          <a:bodyPr wrap="none" rtlCol="0">
+            <a:spAutoFit/>
+          </a:bodyPr>
+          <a:lstStyle/>
+          <a:p>
+            <a:r>
+              <a:rPr lang="en-US" dirty="0" err="1"/>
+              <a:t>lightTheme.ts</a:t>
+            </a:r>
+            <a:r>
+              <a:rPr lang="en-US" dirty="0"/>
+              <a:t>:</a:t>
+            </a:r>
+          </a:p>
+        </p:txBody>
+      </p:sp>
+      <p:sp>
+        <p:nvSpPr>
+          <p:cNvPr id="10" name="TextBox 9">
+            <a:extLst>
+              <a:ext uri="{FF2B5EF4-FFF2-40B4-BE49-F238E27FC236}">
+                <a16:creationId xmlns:a16="http://schemas.microsoft.com/office/drawing/2014/main" id="{B0DA0AEA-12F4-BEFE-48E5-2AB6BF730501}"/>
+              </a:ext>
+            </a:extLst>
+          </p:cNvPr>
+          <p:cNvSpPr txBox="1"/>
+          <p:nvPr/>
+        </p:nvSpPr>
+        <p:spPr>
+          <a:xfrm>
+            <a:off x="6096000" y="1844878"/>
+            <a:ext cx="3553808" cy="369332"/>
+          </a:xfrm>
+          <a:prstGeom prst="rect">
+            <a:avLst/>
+          </a:prstGeom>
+          <a:noFill/>
+        </p:spPr>
+        <p:txBody>
+          <a:bodyPr wrap="square" rtlCol="0">
+            <a:spAutoFit/>
+          </a:bodyPr>
+          <a:lstStyle/>
+          <a:p>
+            <a:r>
+              <a:rPr lang="en-US" dirty="0"/>
+              <a:t>Wrap app with theme provider:</a:t>
+            </a:r>
+          </a:p>
+        </p:txBody>
+      </p:sp>
+      <p:pic>
+        <p:nvPicPr>
+          <p:cNvPr id="12" name="Picture 11">
+            <a:extLst>
+              <a:ext uri="{FF2B5EF4-FFF2-40B4-BE49-F238E27FC236}">
+                <a16:creationId xmlns:a16="http://schemas.microsoft.com/office/drawing/2014/main" id="{2D948904-15F3-C0DB-B51C-F838C600733A}"/>
+              </a:ext>
+            </a:extLst>
+          </p:cNvPr>
+          <p:cNvPicPr>
+            <a:picLocks noChangeAspect="1"/>
+          </p:cNvPicPr>
+          <p:nvPr/>
+        </p:nvPicPr>
+        <p:blipFill>
+          <a:blip r:embed="rId2"/>
+          <a:stretch>
+            <a:fillRect/>
+          </a:stretch>
+        </p:blipFill>
+        <p:spPr>
+          <a:xfrm>
+            <a:off x="1303689" y="2343132"/>
+            <a:ext cx="2467202" cy="4283849"/>
+          </a:xfrm>
+          <a:prstGeom prst="rect">
+            <a:avLst/>
+          </a:prstGeom>
+        </p:spPr>
+      </p:pic>
+      <p:pic>
+        <p:nvPicPr>
+          <p:cNvPr id="14" name="Picture 13">
+            <a:extLst>
+              <a:ext uri="{FF2B5EF4-FFF2-40B4-BE49-F238E27FC236}">
+                <a16:creationId xmlns:a16="http://schemas.microsoft.com/office/drawing/2014/main" id="{F53EA400-9FD2-BF9A-CCE7-146C57D1B0AC}"/>
+              </a:ext>
+            </a:extLst>
+          </p:cNvPr>
+          <p:cNvPicPr>
+            <a:picLocks noChangeAspect="1"/>
+          </p:cNvPicPr>
+          <p:nvPr/>
+        </p:nvPicPr>
+        <p:blipFill>
+          <a:blip r:embed="rId3"/>
+          <a:stretch>
+            <a:fillRect/>
+          </a:stretch>
+        </p:blipFill>
+        <p:spPr>
+          <a:xfrm>
+            <a:off x="6096001" y="2264194"/>
+            <a:ext cx="4099128" cy="4549200"/>
+          </a:xfrm>
+          <a:prstGeom prst="rect">
+            <a:avLst/>
+          </a:prstGeom>
+        </p:spPr>
+      </p:pic>
+    </p:spTree>
+    <p:extLst>
+      <p:ext uri="{BB962C8B-B14F-4D97-AF65-F5344CB8AC3E}">
+        <p14:creationId xmlns:p14="http://schemas.microsoft.com/office/powerpoint/2010/main" val="985363325"/>
+      </p:ext>
+    </p:extLst>
+  </p:cSld>
+  <p:clrMapOvr>
+    <a:masterClrMapping/>
+  </p:clrMapOvr>
+</p:sld>
+</file>
+
+<file path=ppt/slides/slide74.xml><?xml version="1.0" encoding="utf-8"?>
+<p:sld xmlns:a="http://schemas.openxmlformats.org/drawingml/2006/main" xmlns:r="http://schemas.openxmlformats.org/officeDocument/2006/relationships" xmlns:p="http://schemas.openxmlformats.org/presentationml/2006/main">
+  <p:cSld>
+    <p:spTree>
+      <p:nvGrpSpPr>
+        <p:cNvPr id="1" name=""/>
+        <p:cNvGrpSpPr/>
+        <p:nvPr/>
+      </p:nvGrpSpPr>
+      <p:grpSpPr>
+        <a:xfrm>
+          <a:off x="0" y="0"/>
+          <a:ext cx="0" cy="0"/>
+          <a:chOff x="0" y="0"/>
+          <a:chExt cx="0" cy="0"/>
+        </a:xfrm>
+      </p:grpSpPr>
+      <p:sp>
+        <p:nvSpPr>
+          <p:cNvPr id="2" name="Title 1">
+            <a:extLst>
+              <a:ext uri="{FF2B5EF4-FFF2-40B4-BE49-F238E27FC236}">
+                <a16:creationId xmlns:a16="http://schemas.microsoft.com/office/drawing/2014/main" id="{C8D59945-C9A0-178F-FE2F-1E0E18B15CDC}"/>
+              </a:ext>
+            </a:extLst>
+          </p:cNvPr>
+          <p:cNvSpPr>
+            <a:spLocks noGrp="1"/>
+          </p:cNvSpPr>
+          <p:nvPr>
+            <p:ph type="title"/>
+          </p:nvPr>
+        </p:nvSpPr>
+        <p:spPr/>
+        <p:txBody>
+          <a:bodyPr/>
+          <a:lstStyle/>
+          <a:p>
+            <a:r>
+              <a:rPr lang="en-US" dirty="0"/>
+              <a:t>Calling Identity endpoints with </a:t>
+            </a:r>
+            <a:r>
+              <a:rPr lang="en-US" dirty="0" err="1"/>
+              <a:t>tanstack</a:t>
+            </a:r>
+            <a:endParaRPr lang="en-US" dirty="0"/>
+          </a:p>
+        </p:txBody>
+      </p:sp>
+      <p:sp>
+        <p:nvSpPr>
+          <p:cNvPr id="6" name="TextBox 5">
+            <a:extLst>
+              <a:ext uri="{FF2B5EF4-FFF2-40B4-BE49-F238E27FC236}">
+                <a16:creationId xmlns:a16="http://schemas.microsoft.com/office/drawing/2014/main" id="{1B871A9B-EB38-E4D1-09C9-E8A347388B18}"/>
+              </a:ext>
+            </a:extLst>
+          </p:cNvPr>
+          <p:cNvSpPr txBox="1"/>
+          <p:nvPr/>
+        </p:nvSpPr>
+        <p:spPr>
+          <a:xfrm>
+            <a:off x="1562100" y="1968500"/>
+            <a:ext cx="1696298" cy="369332"/>
+          </a:xfrm>
+          <a:prstGeom prst="rect">
+            <a:avLst/>
+          </a:prstGeom>
+          <a:noFill/>
+        </p:spPr>
+        <p:txBody>
+          <a:bodyPr wrap="none" rtlCol="0">
+            <a:spAutoFit/>
+          </a:bodyPr>
+          <a:lstStyle/>
+          <a:p>
+            <a:r>
+              <a:rPr lang="en-US" dirty="0" err="1"/>
+              <a:t>UserAccount.ts</a:t>
+            </a:r>
+            <a:r>
+              <a:rPr lang="en-US" dirty="0"/>
+              <a:t>:</a:t>
+            </a:r>
+          </a:p>
+        </p:txBody>
+      </p:sp>
+      <p:pic>
+        <p:nvPicPr>
+          <p:cNvPr id="8" name="Picture 7">
+            <a:extLst>
+              <a:ext uri="{FF2B5EF4-FFF2-40B4-BE49-F238E27FC236}">
+                <a16:creationId xmlns:a16="http://schemas.microsoft.com/office/drawing/2014/main" id="{AF5D39CE-A2D5-BFD5-4C10-EC80916E5B2D}"/>
+              </a:ext>
+            </a:extLst>
+          </p:cNvPr>
+          <p:cNvPicPr>
+            <a:picLocks noChangeAspect="1"/>
+          </p:cNvPicPr>
+          <p:nvPr/>
+        </p:nvPicPr>
+        <p:blipFill>
+          <a:blip r:embed="rId2"/>
+          <a:stretch>
+            <a:fillRect/>
+          </a:stretch>
+        </p:blipFill>
+        <p:spPr>
+          <a:xfrm>
+            <a:off x="7213366" y="3109825"/>
+            <a:ext cx="3353268" cy="1247949"/>
+          </a:xfrm>
+          <a:prstGeom prst="rect">
+            <a:avLst/>
+          </a:prstGeom>
+        </p:spPr>
+      </p:pic>
+      <p:sp>
+        <p:nvSpPr>
+          <p:cNvPr id="9" name="TextBox 8">
+            <a:extLst>
+              <a:ext uri="{FF2B5EF4-FFF2-40B4-BE49-F238E27FC236}">
+                <a16:creationId xmlns:a16="http://schemas.microsoft.com/office/drawing/2014/main" id="{624F04C1-5C0C-E299-0764-30453D3FED2C}"/>
+              </a:ext>
+            </a:extLst>
+          </p:cNvPr>
+          <p:cNvSpPr txBox="1"/>
+          <p:nvPr/>
+        </p:nvSpPr>
+        <p:spPr>
+          <a:xfrm>
+            <a:off x="7277100" y="2740493"/>
+            <a:ext cx="1007007" cy="369332"/>
+          </a:xfrm>
+          <a:prstGeom prst="rect">
+            <a:avLst/>
+          </a:prstGeom>
+          <a:noFill/>
+        </p:spPr>
+        <p:txBody>
+          <a:bodyPr wrap="none" rtlCol="0">
+            <a:spAutoFit/>
+          </a:bodyPr>
+          <a:lstStyle/>
+          <a:p>
+            <a:r>
+              <a:rPr lang="en-US" dirty="0" err="1"/>
+              <a:t>Agent.ts</a:t>
+            </a:r>
+            <a:r>
+              <a:rPr lang="en-US" dirty="0"/>
+              <a:t>:</a:t>
+            </a:r>
+          </a:p>
+        </p:txBody>
+      </p:sp>
+      <p:sp>
+        <p:nvSpPr>
+          <p:cNvPr id="10" name="Rectangle 9">
+            <a:extLst>
+              <a:ext uri="{FF2B5EF4-FFF2-40B4-BE49-F238E27FC236}">
+                <a16:creationId xmlns:a16="http://schemas.microsoft.com/office/drawing/2014/main" id="{9F1F5B64-DA4E-5C88-D971-C7C748255159}"/>
+              </a:ext>
+            </a:extLst>
+          </p:cNvPr>
+          <p:cNvSpPr/>
+          <p:nvPr/>
+        </p:nvSpPr>
+        <p:spPr>
+          <a:xfrm>
+            <a:off x="7670800" y="3868389"/>
+            <a:ext cx="1638300" cy="195611"/>
+          </a:xfrm>
+          <a:prstGeom prst="rect">
+            <a:avLst/>
+          </a:prstGeom>
+          <a:noFill/>
+          <a:ln>
+            <a:solidFill>
+              <a:srgbClr val="FF0000"/>
+            </a:solidFill>
+          </a:ln>
+        </p:spPr>
+        <p:style>
+          <a:lnRef idx="2">
+            <a:schemeClr val="accent1">
+              <a:shade val="15000"/>
+            </a:schemeClr>
+          </a:lnRef>
+          <a:fillRef idx="1">
+            <a:schemeClr val="accent1"/>
+          </a:fillRef>
+          <a:effectRef idx="0">
+            <a:schemeClr val="accent1"/>
+          </a:effectRef>
+          <a:fontRef idx="minor">
+            <a:schemeClr val="lt1"/>
+          </a:fontRef>
+        </p:style>
+        <p:txBody>
+          <a:bodyPr rtlCol="0" anchor="ctr"/>
+          <a:lstStyle/>
+          <a:p>
+            <a:pPr algn="ctr"/>
+            <a:endParaRPr lang="en-US"/>
+          </a:p>
+        </p:txBody>
+      </p:sp>
+      <p:sp>
+        <p:nvSpPr>
+          <p:cNvPr id="11" name="TextBox 10">
+            <a:extLst>
+              <a:ext uri="{FF2B5EF4-FFF2-40B4-BE49-F238E27FC236}">
+                <a16:creationId xmlns:a16="http://schemas.microsoft.com/office/drawing/2014/main" id="{68E7B530-644B-E7A0-2483-B0B6ECD45F6D}"/>
+              </a:ext>
+            </a:extLst>
+          </p:cNvPr>
+          <p:cNvSpPr txBox="1"/>
+          <p:nvPr/>
+        </p:nvSpPr>
+        <p:spPr>
+          <a:xfrm>
+            <a:off x="6392110" y="4503694"/>
+            <a:ext cx="4741779" cy="646331"/>
+          </a:xfrm>
+          <a:prstGeom prst="rect">
+            <a:avLst/>
+          </a:prstGeom>
+          <a:noFill/>
+        </p:spPr>
+        <p:txBody>
+          <a:bodyPr wrap="square" rtlCol="0">
+            <a:spAutoFit/>
+          </a:bodyPr>
+          <a:lstStyle/>
+          <a:p>
+            <a:pPr algn="ctr"/>
+            <a:r>
+              <a:rPr lang="en-US" dirty="0"/>
+              <a:t>This will ensure the http only cookie gets sent along with future requests</a:t>
+            </a:r>
+          </a:p>
+        </p:txBody>
+      </p:sp>
+      <p:pic>
+        <p:nvPicPr>
+          <p:cNvPr id="13" name="Picture 12">
+            <a:extLst>
+              <a:ext uri="{FF2B5EF4-FFF2-40B4-BE49-F238E27FC236}">
+                <a16:creationId xmlns:a16="http://schemas.microsoft.com/office/drawing/2014/main" id="{494330EA-F2BC-680B-6B32-041C6743E56D}"/>
+              </a:ext>
+            </a:extLst>
+          </p:cNvPr>
+          <p:cNvPicPr>
+            <a:picLocks noChangeAspect="1"/>
+          </p:cNvPicPr>
+          <p:nvPr/>
+        </p:nvPicPr>
+        <p:blipFill>
+          <a:blip r:embed="rId3"/>
+          <a:stretch>
+            <a:fillRect/>
+          </a:stretch>
+        </p:blipFill>
+        <p:spPr>
+          <a:xfrm>
+            <a:off x="890771" y="2309339"/>
+            <a:ext cx="4024130" cy="4388710"/>
+          </a:xfrm>
+          <a:prstGeom prst="rect">
+            <a:avLst/>
+          </a:prstGeom>
+        </p:spPr>
+      </p:pic>
+    </p:spTree>
+    <p:extLst>
+      <p:ext uri="{BB962C8B-B14F-4D97-AF65-F5344CB8AC3E}">
+        <p14:creationId xmlns:p14="http://schemas.microsoft.com/office/powerpoint/2010/main" val="1981730460"/>
+      </p:ext>
+    </p:extLst>
+  </p:cSld>
+  <p:clrMapOvr>
+    <a:masterClrMapping/>
+  </p:clrMapOvr>
+</p:sld>
+</file>
+
+<file path=ppt/slides/slide75.xml><?xml version="1.0" encoding="utf-8"?>
+<p:sld xmlns:a="http://schemas.openxmlformats.org/drawingml/2006/main" xmlns:r="http://schemas.openxmlformats.org/officeDocument/2006/relationships" xmlns:p="http://schemas.openxmlformats.org/presentationml/2006/main">
+  <p:cSld>
+    <p:spTree>
+      <p:nvGrpSpPr>
+        <p:cNvPr id="1" name=""/>
+        <p:cNvGrpSpPr/>
+        <p:nvPr/>
+      </p:nvGrpSpPr>
+      <p:grpSpPr>
+        <a:xfrm>
+          <a:off x="0" y="0"/>
+          <a:ext cx="0" cy="0"/>
+          <a:chOff x="0" y="0"/>
+          <a:chExt cx="0" cy="0"/>
+        </a:xfrm>
+      </p:grpSpPr>
+      <p:sp>
+        <p:nvSpPr>
+          <p:cNvPr id="2" name="Title 1">
+            <a:extLst>
+              <a:ext uri="{FF2B5EF4-FFF2-40B4-BE49-F238E27FC236}">
+                <a16:creationId xmlns:a16="http://schemas.microsoft.com/office/drawing/2014/main" id="{78B24ED2-51D3-EE70-D90B-029B606855AD}"/>
+              </a:ext>
+            </a:extLst>
+          </p:cNvPr>
+          <p:cNvSpPr>
+            <a:spLocks noGrp="1"/>
+          </p:cNvSpPr>
+          <p:nvPr>
+            <p:ph type="title"/>
+          </p:nvPr>
+        </p:nvSpPr>
+        <p:spPr/>
+        <p:txBody>
+          <a:bodyPr/>
+          <a:lstStyle/>
+          <a:p>
+            <a:r>
+              <a:rPr lang="en-US" dirty="0"/>
+              <a:t>Conditionally Making queries</a:t>
+            </a:r>
+          </a:p>
+        </p:txBody>
+      </p:sp>
+      <p:pic>
+        <p:nvPicPr>
+          <p:cNvPr id="7" name="Picture 6">
+            <a:extLst>
+              <a:ext uri="{FF2B5EF4-FFF2-40B4-BE49-F238E27FC236}">
+                <a16:creationId xmlns:a16="http://schemas.microsoft.com/office/drawing/2014/main" id="{E743C6C6-DC67-08CB-550C-0BC8D597EF0B}"/>
+              </a:ext>
+            </a:extLst>
+          </p:cNvPr>
+          <p:cNvPicPr>
+            <a:picLocks noChangeAspect="1"/>
+          </p:cNvPicPr>
+          <p:nvPr/>
+        </p:nvPicPr>
+        <p:blipFill>
+          <a:blip r:embed="rId2"/>
+          <a:stretch>
+            <a:fillRect/>
+          </a:stretch>
+        </p:blipFill>
+        <p:spPr>
+          <a:xfrm>
+            <a:off x="3712005" y="5305897"/>
+            <a:ext cx="4767990" cy="1382026"/>
+          </a:xfrm>
+          <a:prstGeom prst="rect">
+            <a:avLst/>
+          </a:prstGeom>
+        </p:spPr>
+      </p:pic>
+      <p:sp>
+        <p:nvSpPr>
+          <p:cNvPr id="8" name="TextBox 7">
+            <a:extLst>
+              <a:ext uri="{FF2B5EF4-FFF2-40B4-BE49-F238E27FC236}">
+                <a16:creationId xmlns:a16="http://schemas.microsoft.com/office/drawing/2014/main" id="{F0DBAE0F-931D-C989-8148-B1BDA2456FFC}"/>
+              </a:ext>
+            </a:extLst>
+          </p:cNvPr>
+          <p:cNvSpPr txBox="1"/>
+          <p:nvPr/>
+        </p:nvSpPr>
+        <p:spPr>
+          <a:xfrm>
+            <a:off x="1825625" y="1955966"/>
+            <a:ext cx="8540750" cy="923330"/>
+          </a:xfrm>
+          <a:prstGeom prst="rect">
+            <a:avLst/>
+          </a:prstGeom>
+          <a:noFill/>
+        </p:spPr>
+        <p:txBody>
+          <a:bodyPr wrap="square" rtlCol="0">
+            <a:spAutoFit/>
+          </a:bodyPr>
+          <a:lstStyle/>
+          <a:p>
+            <a:r>
+              <a:rPr lang="en-US" dirty="0"/>
+              <a:t>Once we’ve setup identity, we can bring in the </a:t>
+            </a:r>
+            <a:r>
+              <a:rPr lang="en-US" dirty="0" err="1"/>
+              <a:t>currentUser</a:t>
+            </a:r>
+            <a:r>
+              <a:rPr lang="en-US" dirty="0"/>
+              <a:t> from our custom hook into our </a:t>
+            </a:r>
+            <a:r>
+              <a:rPr lang="en-US" dirty="0" err="1"/>
+              <a:t>useActivities</a:t>
+            </a:r>
+            <a:r>
+              <a:rPr lang="en-US" dirty="0"/>
+              <a:t> custom hook, this lets us stop queries from executing from </a:t>
+            </a:r>
+            <a:r>
+              <a:rPr lang="en-US" dirty="0" err="1"/>
+              <a:t>Tanstack</a:t>
+            </a:r>
+            <a:r>
+              <a:rPr lang="en-US" dirty="0"/>
+              <a:t> unless we are authenticated:</a:t>
+            </a:r>
+          </a:p>
+        </p:txBody>
+      </p:sp>
+      <p:pic>
+        <p:nvPicPr>
+          <p:cNvPr id="11" name="Picture 10">
+            <a:extLst>
+              <a:ext uri="{FF2B5EF4-FFF2-40B4-BE49-F238E27FC236}">
+                <a16:creationId xmlns:a16="http://schemas.microsoft.com/office/drawing/2014/main" id="{A4CD9EA5-A9EB-3738-8CF5-CF9C1F972759}"/>
+              </a:ext>
+            </a:extLst>
+          </p:cNvPr>
+          <p:cNvPicPr>
+            <a:picLocks noChangeAspect="1"/>
+          </p:cNvPicPr>
+          <p:nvPr/>
+        </p:nvPicPr>
+        <p:blipFill>
+          <a:blip r:embed="rId3"/>
+          <a:stretch>
+            <a:fillRect/>
+          </a:stretch>
+        </p:blipFill>
+        <p:spPr>
+          <a:xfrm>
+            <a:off x="4072974" y="3044227"/>
+            <a:ext cx="4046052" cy="2096739"/>
+          </a:xfrm>
+          <a:prstGeom prst="rect">
+            <a:avLst/>
+          </a:prstGeom>
+        </p:spPr>
+      </p:pic>
+    </p:spTree>
+    <p:extLst>
+      <p:ext uri="{BB962C8B-B14F-4D97-AF65-F5344CB8AC3E}">
+        <p14:creationId xmlns:p14="http://schemas.microsoft.com/office/powerpoint/2010/main" val="906216231"/>
+      </p:ext>
+    </p:extLst>
+  </p:cSld>
+  <p:clrMapOvr>
+    <a:masterClrMapping/>
+  </p:clrMapOvr>
+</p:sld>
+</file>
+
+<file path=ppt/slides/slide76.xml><?xml version="1.0" encoding="utf-8"?>
+<p:sld xmlns:a="http://schemas.openxmlformats.org/drawingml/2006/main" xmlns:r="http://schemas.openxmlformats.org/officeDocument/2006/relationships" xmlns:p="http://schemas.openxmlformats.org/presentationml/2006/main">
+  <p:cSld>
+    <p:spTree>
+      <p:nvGrpSpPr>
+        <p:cNvPr id="1" name=""/>
+        <p:cNvGrpSpPr/>
+        <p:nvPr/>
+      </p:nvGrpSpPr>
+      <p:grpSpPr>
+        <a:xfrm>
+          <a:off x="0" y="0"/>
+          <a:ext cx="0" cy="0"/>
+          <a:chOff x="0" y="0"/>
+          <a:chExt cx="0" cy="0"/>
+        </a:xfrm>
+      </p:grpSpPr>
+      <p:sp>
+        <p:nvSpPr>
+          <p:cNvPr id="2" name="Title 1">
+            <a:extLst>
+              <a:ext uri="{FF2B5EF4-FFF2-40B4-BE49-F238E27FC236}">
+                <a16:creationId xmlns:a16="http://schemas.microsoft.com/office/drawing/2014/main" id="{77622877-DD01-1B4E-7F20-28E2498B256E}"/>
+              </a:ext>
+            </a:extLst>
+          </p:cNvPr>
+          <p:cNvSpPr>
+            <a:spLocks noGrp="1"/>
+          </p:cNvSpPr>
+          <p:nvPr>
+            <p:ph type="title"/>
+          </p:nvPr>
+        </p:nvSpPr>
+        <p:spPr/>
+        <p:txBody>
+          <a:bodyPr/>
+          <a:lstStyle/>
+          <a:p>
+            <a:r>
+              <a:rPr lang="en-US" dirty="0"/>
+              <a:t>Private Routes</a:t>
+            </a:r>
+          </a:p>
+        </p:txBody>
+      </p:sp>
+      <p:pic>
+        <p:nvPicPr>
+          <p:cNvPr id="5" name="Picture 4">
+            <a:extLst>
+              <a:ext uri="{FF2B5EF4-FFF2-40B4-BE49-F238E27FC236}">
+                <a16:creationId xmlns:a16="http://schemas.microsoft.com/office/drawing/2014/main" id="{6FF7C224-7617-26B2-2F5D-FA7B9099B7C6}"/>
+              </a:ext>
+            </a:extLst>
+          </p:cNvPr>
+          <p:cNvPicPr>
+            <a:picLocks noChangeAspect="1"/>
+          </p:cNvPicPr>
+          <p:nvPr/>
+        </p:nvPicPr>
+        <p:blipFill>
+          <a:blip r:embed="rId2"/>
+          <a:stretch>
+            <a:fillRect/>
+          </a:stretch>
+        </p:blipFill>
+        <p:spPr>
+          <a:xfrm>
+            <a:off x="676195" y="2381568"/>
+            <a:ext cx="4603476" cy="3802238"/>
+          </a:xfrm>
+          <a:prstGeom prst="rect">
+            <a:avLst/>
+          </a:prstGeom>
+        </p:spPr>
+      </p:pic>
+      <p:pic>
+        <p:nvPicPr>
+          <p:cNvPr id="7" name="Picture 6">
+            <a:extLst>
+              <a:ext uri="{FF2B5EF4-FFF2-40B4-BE49-F238E27FC236}">
+                <a16:creationId xmlns:a16="http://schemas.microsoft.com/office/drawing/2014/main" id="{741C99A4-96AF-7CA2-5776-A8AA8EDE925A}"/>
+              </a:ext>
+            </a:extLst>
+          </p:cNvPr>
+          <p:cNvPicPr>
+            <a:picLocks noChangeAspect="1"/>
+          </p:cNvPicPr>
+          <p:nvPr/>
+        </p:nvPicPr>
+        <p:blipFill>
+          <a:blip r:embed="rId3"/>
+          <a:stretch>
+            <a:fillRect/>
+          </a:stretch>
+        </p:blipFill>
+        <p:spPr>
+          <a:xfrm>
+            <a:off x="5866431" y="2381568"/>
+            <a:ext cx="5744377" cy="3858163"/>
+          </a:xfrm>
+          <a:prstGeom prst="rect">
+            <a:avLst/>
+          </a:prstGeom>
+        </p:spPr>
+      </p:pic>
+      <p:sp>
+        <p:nvSpPr>
+          <p:cNvPr id="8" name="TextBox 7">
+            <a:extLst>
+              <a:ext uri="{FF2B5EF4-FFF2-40B4-BE49-F238E27FC236}">
+                <a16:creationId xmlns:a16="http://schemas.microsoft.com/office/drawing/2014/main" id="{438782F6-B6E4-A692-57A0-8F635A5121AE}"/>
+              </a:ext>
+            </a:extLst>
+          </p:cNvPr>
+          <p:cNvSpPr txBox="1"/>
+          <p:nvPr/>
+        </p:nvSpPr>
+        <p:spPr>
+          <a:xfrm>
+            <a:off x="676195" y="2012236"/>
+            <a:ext cx="1225015" cy="369332"/>
+          </a:xfrm>
+          <a:prstGeom prst="rect">
+            <a:avLst/>
+          </a:prstGeom>
+          <a:noFill/>
+        </p:spPr>
+        <p:txBody>
+          <a:bodyPr wrap="none" rtlCol="0">
+            <a:spAutoFit/>
+          </a:bodyPr>
+          <a:lstStyle/>
+          <a:p>
+            <a:r>
+              <a:rPr lang="en-US" dirty="0" err="1"/>
+              <a:t>Routes.tsx</a:t>
+            </a:r>
+            <a:r>
+              <a:rPr lang="en-US" dirty="0"/>
+              <a:t>:</a:t>
+            </a:r>
+          </a:p>
+        </p:txBody>
+      </p:sp>
+      <p:sp>
+        <p:nvSpPr>
+          <p:cNvPr id="9" name="TextBox 8">
+            <a:extLst>
+              <a:ext uri="{FF2B5EF4-FFF2-40B4-BE49-F238E27FC236}">
+                <a16:creationId xmlns:a16="http://schemas.microsoft.com/office/drawing/2014/main" id="{FE8D0341-074D-7F70-2B4C-E1A6B49E6FEB}"/>
+              </a:ext>
+            </a:extLst>
+          </p:cNvPr>
+          <p:cNvSpPr txBox="1"/>
+          <p:nvPr/>
+        </p:nvSpPr>
+        <p:spPr>
+          <a:xfrm>
+            <a:off x="5866431" y="2012236"/>
+            <a:ext cx="1759008" cy="369332"/>
+          </a:xfrm>
+          <a:prstGeom prst="rect">
+            <a:avLst/>
+          </a:prstGeom>
+          <a:noFill/>
+        </p:spPr>
+        <p:txBody>
+          <a:bodyPr wrap="none" rtlCol="0">
+            <a:spAutoFit/>
+          </a:bodyPr>
+          <a:lstStyle/>
+          <a:p>
+            <a:r>
+              <a:rPr lang="en-US" dirty="0" err="1"/>
+              <a:t>RequireAuth.tsx</a:t>
+            </a:r>
+            <a:r>
+              <a:rPr lang="en-US" dirty="0"/>
+              <a:t>:</a:t>
+            </a:r>
+          </a:p>
+        </p:txBody>
+      </p:sp>
+    </p:spTree>
+    <p:extLst>
+      <p:ext uri="{BB962C8B-B14F-4D97-AF65-F5344CB8AC3E}">
+        <p14:creationId xmlns:p14="http://schemas.microsoft.com/office/powerpoint/2010/main" val="2290544838"/>
+      </p:ext>
+    </p:extLst>
+  </p:cSld>
+  <p:clrMapOvr>
+    <a:masterClrMapping/>
+  </p:clrMapOvr>
+</p:sld>
+</file>
+
+<file path=ppt/slides/slide77.xml><?xml version="1.0" encoding="utf-8"?>
+<p:sld xmlns:a="http://schemas.openxmlformats.org/drawingml/2006/main" xmlns:r="http://schemas.openxmlformats.org/officeDocument/2006/relationships" xmlns:p="http://schemas.openxmlformats.org/presentationml/2006/main">
+  <p:cSld>
+    <p:spTree>
+      <p:nvGrpSpPr>
+        <p:cNvPr id="1" name=""/>
+        <p:cNvGrpSpPr/>
+        <p:nvPr/>
+      </p:nvGrpSpPr>
+      <p:grpSpPr>
+        <a:xfrm>
+          <a:off x="0" y="0"/>
+          <a:ext cx="0" cy="0"/>
+          <a:chOff x="0" y="0"/>
+          <a:chExt cx="0" cy="0"/>
+        </a:xfrm>
+      </p:grpSpPr>
+      <p:sp>
+        <p:nvSpPr>
+          <p:cNvPr id="2" name="Title 1">
+            <a:extLst>
+              <a:ext uri="{FF2B5EF4-FFF2-40B4-BE49-F238E27FC236}">
+                <a16:creationId xmlns:a16="http://schemas.microsoft.com/office/drawing/2014/main" id="{B00BCB73-E857-3E38-579E-3EDC21B6418B}"/>
+              </a:ext>
+            </a:extLst>
+          </p:cNvPr>
+          <p:cNvSpPr>
+            <a:spLocks noGrp="1"/>
+          </p:cNvSpPr>
+          <p:nvPr>
+            <p:ph type="title"/>
+          </p:nvPr>
+        </p:nvSpPr>
+        <p:spPr/>
+        <p:txBody>
+          <a:bodyPr/>
+          <a:lstStyle/>
+          <a:p>
+            <a:r>
+              <a:rPr lang="en-US" dirty="0"/>
+              <a:t>Login form redirect</a:t>
+            </a:r>
+          </a:p>
+        </p:txBody>
+      </p:sp>
+      <p:sp>
+        <p:nvSpPr>
+          <p:cNvPr id="3" name="Content Placeholder 2">
+            <a:extLst>
+              <a:ext uri="{FF2B5EF4-FFF2-40B4-BE49-F238E27FC236}">
+                <a16:creationId xmlns:a16="http://schemas.microsoft.com/office/drawing/2014/main" id="{DAE5D3CC-3052-3621-CC18-40D408983F13}"/>
+              </a:ext>
+            </a:extLst>
+          </p:cNvPr>
+          <p:cNvSpPr>
+            <a:spLocks noGrp="1"/>
+          </p:cNvSpPr>
+          <p:nvPr>
+            <p:ph idx="1"/>
+          </p:nvPr>
+        </p:nvSpPr>
+        <p:spPr>
+          <a:xfrm>
+            <a:off x="581192" y="2180496"/>
+            <a:ext cx="11029615" cy="831645"/>
+          </a:xfrm>
+        </p:spPr>
+        <p:txBody>
+          <a:bodyPr/>
+          <a:lstStyle/>
+          <a:p>
+            <a:r>
+              <a:rPr lang="en-US" dirty="0"/>
+              <a:t>After logging in we can send them back to their last location state if it exists</a:t>
+            </a:r>
+          </a:p>
+          <a:p>
+            <a:r>
+              <a:rPr lang="en-US" dirty="0"/>
+              <a:t>OR ‘/activities’ if there wasn’t a last location</a:t>
+            </a:r>
+          </a:p>
+        </p:txBody>
+      </p:sp>
+      <p:pic>
+        <p:nvPicPr>
+          <p:cNvPr id="7" name="Picture 6">
+            <a:extLst>
+              <a:ext uri="{FF2B5EF4-FFF2-40B4-BE49-F238E27FC236}">
+                <a16:creationId xmlns:a16="http://schemas.microsoft.com/office/drawing/2014/main" id="{78C2927C-1E7B-F46F-6612-26CA812F64AC}"/>
+              </a:ext>
+            </a:extLst>
+          </p:cNvPr>
+          <p:cNvPicPr>
+            <a:picLocks noChangeAspect="1"/>
+          </p:cNvPicPr>
+          <p:nvPr/>
+        </p:nvPicPr>
+        <p:blipFill>
+          <a:blip r:embed="rId2"/>
+          <a:stretch>
+            <a:fillRect/>
+          </a:stretch>
+        </p:blipFill>
+        <p:spPr>
+          <a:xfrm>
+            <a:off x="3987013" y="3229494"/>
+            <a:ext cx="4217974" cy="3340201"/>
+          </a:xfrm>
+          <a:prstGeom prst="rect">
+            <a:avLst/>
+          </a:prstGeom>
+        </p:spPr>
+      </p:pic>
+    </p:spTree>
+    <p:extLst>
+      <p:ext uri="{BB962C8B-B14F-4D97-AF65-F5344CB8AC3E}">
+        <p14:creationId xmlns:p14="http://schemas.microsoft.com/office/powerpoint/2010/main" val="1554131052"/>
+      </p:ext>
+    </p:extLst>
+  </p:cSld>
+  <p:clrMapOvr>
+    <a:masterClrMapping/>
+  </p:clrMapOvr>
+</p:sld>
+</file>
+
+<file path=ppt/slides/slide78.xml><?xml version="1.0" encoding="utf-8"?>
 <p:sld xmlns:a="http://schemas.openxmlformats.org/drawingml/2006/main" xmlns:r="http://schemas.openxmlformats.org/officeDocument/2006/relationships" xmlns:p="http://schemas.openxmlformats.org/presentationml/2006/main" show="0">
   <p:cSld>
     <p:spTree>
@@ -24887,7 +25873,7 @@
 </p:sld>
 </file>
 
-<file path=ppt/slides/slide74.xml><?xml version="1.0" encoding="utf-8"?>
+<file path=ppt/slides/slide79.xml><?xml version="1.0" encoding="utf-8"?>
 <p:sld xmlns:a="http://schemas.openxmlformats.org/drawingml/2006/main" xmlns:r="http://schemas.openxmlformats.org/officeDocument/2006/relationships" xmlns:p="http://schemas.openxmlformats.org/presentationml/2006/main" show="0">
   <p:cSld>
     <p:spTree>
@@ -25016,7 +26002,95 @@
 </p:sld>
 </file>
 
-<file path=ppt/slides/slide75.xml><?xml version="1.0" encoding="utf-8"?>
+<file path=ppt/slides/slide8.xml><?xml version="1.0" encoding="utf-8"?>
+<p:sld xmlns:a="http://schemas.openxmlformats.org/drawingml/2006/main" xmlns:r="http://schemas.openxmlformats.org/officeDocument/2006/relationships" xmlns:p="http://schemas.openxmlformats.org/presentationml/2006/main">
+  <p:cSld>
+    <p:spTree>
+      <p:nvGrpSpPr>
+        <p:cNvPr id="1" name=""/>
+        <p:cNvGrpSpPr/>
+        <p:nvPr/>
+      </p:nvGrpSpPr>
+      <p:grpSpPr>
+        <a:xfrm>
+          <a:off x="0" y="0"/>
+          <a:ext cx="0" cy="0"/>
+          <a:chOff x="0" y="0"/>
+          <a:chExt cx="0" cy="0"/>
+        </a:xfrm>
+      </p:grpSpPr>
+      <p:sp>
+        <p:nvSpPr>
+          <p:cNvPr id="2" name="Title 1">
+            <a:extLst>
+              <a:ext uri="{FF2B5EF4-FFF2-40B4-BE49-F238E27FC236}">
+                <a16:creationId xmlns:a16="http://schemas.microsoft.com/office/drawing/2014/main" id="{050CC5F5-E926-6D5E-A18F-BC6093C62F2C}"/>
+              </a:ext>
+            </a:extLst>
+          </p:cNvPr>
+          <p:cNvSpPr>
+            <a:spLocks noGrp="1"/>
+          </p:cNvSpPr>
+          <p:nvPr>
+            <p:ph type="title"/>
+          </p:nvPr>
+        </p:nvSpPr>
+        <p:spPr/>
+        <p:txBody>
+          <a:bodyPr/>
+          <a:lstStyle/>
+          <a:p>
+            <a:r>
+              <a:rPr lang="en-US" dirty="0"/>
+              <a:t>Typescript Classes</a:t>
+            </a:r>
+          </a:p>
+        </p:txBody>
+      </p:sp>
+      <p:pic>
+        <p:nvPicPr>
+          <p:cNvPr id="5" name="Picture 4">
+            <a:extLst>
+              <a:ext uri="{FF2B5EF4-FFF2-40B4-BE49-F238E27FC236}">
+                <a16:creationId xmlns:a16="http://schemas.microsoft.com/office/drawing/2014/main" id="{70B16B3B-F153-B5DB-3173-FA0048C1618F}"/>
+              </a:ext>
+            </a:extLst>
+          </p:cNvPr>
+          <p:cNvPicPr>
+            <a:picLocks noChangeAspect="1"/>
+          </p:cNvPicPr>
+          <p:nvPr/>
+        </p:nvPicPr>
+        <p:blipFill>
+          <a:blip r:embed="rId2"/>
+          <a:stretch>
+            <a:fillRect/>
+          </a:stretch>
+        </p:blipFill>
+        <p:spPr>
+          <a:xfrm>
+            <a:off x="4155416" y="2475751"/>
+            <a:ext cx="4096322" cy="2934109"/>
+          </a:xfrm>
+          <a:prstGeom prst="rect">
+            <a:avLst/>
+          </a:prstGeom>
+        </p:spPr>
+      </p:pic>
+    </p:spTree>
+    <p:extLst>
+      <p:ext uri="{BB962C8B-B14F-4D97-AF65-F5344CB8AC3E}">
+        <p14:creationId xmlns:p14="http://schemas.microsoft.com/office/powerpoint/2010/main" val="1550932351"/>
+      </p:ext>
+    </p:extLst>
+  </p:cSld>
+  <p:clrMapOvr>
+    <a:masterClrMapping/>
+  </p:clrMapOvr>
+</p:sld>
+</file>
+
+<file path=ppt/slides/slide80.xml><?xml version="1.0" encoding="utf-8"?>
 <p:sld xmlns:a="http://schemas.openxmlformats.org/drawingml/2006/main" xmlns:r="http://schemas.openxmlformats.org/officeDocument/2006/relationships" xmlns:p="http://schemas.openxmlformats.org/presentationml/2006/main" show="0">
   <p:cSld>
     <p:spTree>
@@ -25287,7 +26361,7 @@
 </p:sld>
 </file>
 
-<file path=ppt/slides/slide76.xml><?xml version="1.0" encoding="utf-8"?>
+<file path=ppt/slides/slide81.xml><?xml version="1.0" encoding="utf-8"?>
 <p:sld xmlns:a="http://schemas.openxmlformats.org/drawingml/2006/main" xmlns:r="http://schemas.openxmlformats.org/officeDocument/2006/relationships" xmlns:p="http://schemas.openxmlformats.org/presentationml/2006/main" show="0">
   <p:cSld>
     <p:spTree>
@@ -25733,7 +26807,7 @@
 </p:sld>
 </file>
 
-<file path=ppt/slides/slide77.xml><?xml version="1.0" encoding="utf-8"?>
+<file path=ppt/slides/slide82.xml><?xml version="1.0" encoding="utf-8"?>
 <p:sld xmlns:a="http://schemas.openxmlformats.org/drawingml/2006/main" xmlns:r="http://schemas.openxmlformats.org/officeDocument/2006/relationships" xmlns:p="http://schemas.openxmlformats.org/presentationml/2006/main" show="0">
   <p:cSld>
     <p:spTree>
@@ -26180,7 +27254,7 @@
 </p:sld>
 </file>
 
-<file path=ppt/slides/slide78.xml><?xml version="1.0" encoding="utf-8"?>
+<file path=ppt/slides/slide83.xml><?xml version="1.0" encoding="utf-8"?>
 <p:sld xmlns:a="http://schemas.openxmlformats.org/drawingml/2006/main" xmlns:r="http://schemas.openxmlformats.org/officeDocument/2006/relationships" xmlns:p="http://schemas.openxmlformats.org/presentationml/2006/main" show="0">
   <p:cSld>
     <p:spTree>
@@ -26597,7 +27671,7 @@
 </p:sld>
 </file>
 
-<file path=ppt/slides/slide79.xml><?xml version="1.0" encoding="utf-8"?>
+<file path=ppt/slides/slide84.xml><?xml version="1.0" encoding="utf-8"?>
 <p:sld xmlns:a="http://schemas.openxmlformats.org/drawingml/2006/main" xmlns:r="http://schemas.openxmlformats.org/officeDocument/2006/relationships" xmlns:p="http://schemas.openxmlformats.org/presentationml/2006/main" show="0">
   <p:cSld>
     <p:spTree>
@@ -27131,94 +28205,6 @@
     <p:extLst>
       <p:ext uri="{BB962C8B-B14F-4D97-AF65-F5344CB8AC3E}">
         <p14:creationId xmlns:p14="http://schemas.microsoft.com/office/powerpoint/2010/main" val="3476056970"/>
-      </p:ext>
-    </p:extLst>
-  </p:cSld>
-  <p:clrMapOvr>
-    <a:masterClrMapping/>
-  </p:clrMapOvr>
-</p:sld>
-</file>
-
-<file path=ppt/slides/slide8.xml><?xml version="1.0" encoding="utf-8"?>
-<p:sld xmlns:a="http://schemas.openxmlformats.org/drawingml/2006/main" xmlns:r="http://schemas.openxmlformats.org/officeDocument/2006/relationships" xmlns:p="http://schemas.openxmlformats.org/presentationml/2006/main">
-  <p:cSld>
-    <p:spTree>
-      <p:nvGrpSpPr>
-        <p:cNvPr id="1" name=""/>
-        <p:cNvGrpSpPr/>
-        <p:nvPr/>
-      </p:nvGrpSpPr>
-      <p:grpSpPr>
-        <a:xfrm>
-          <a:off x="0" y="0"/>
-          <a:ext cx="0" cy="0"/>
-          <a:chOff x="0" y="0"/>
-          <a:chExt cx="0" cy="0"/>
-        </a:xfrm>
-      </p:grpSpPr>
-      <p:sp>
-        <p:nvSpPr>
-          <p:cNvPr id="2" name="Title 1">
-            <a:extLst>
-              <a:ext uri="{FF2B5EF4-FFF2-40B4-BE49-F238E27FC236}">
-                <a16:creationId xmlns:a16="http://schemas.microsoft.com/office/drawing/2014/main" id="{050CC5F5-E926-6D5E-A18F-BC6093C62F2C}"/>
-              </a:ext>
-            </a:extLst>
-          </p:cNvPr>
-          <p:cNvSpPr>
-            <a:spLocks noGrp="1"/>
-          </p:cNvSpPr>
-          <p:nvPr>
-            <p:ph type="title"/>
-          </p:nvPr>
-        </p:nvSpPr>
-        <p:spPr/>
-        <p:txBody>
-          <a:bodyPr/>
-          <a:lstStyle/>
-          <a:p>
-            <a:r>
-              <a:rPr lang="en-US" dirty="0"/>
-              <a:t>Typescript Classes</a:t>
-            </a:r>
-          </a:p>
-        </p:txBody>
-      </p:sp>
-      <p:pic>
-        <p:nvPicPr>
-          <p:cNvPr id="5" name="Picture 4">
-            <a:extLst>
-              <a:ext uri="{FF2B5EF4-FFF2-40B4-BE49-F238E27FC236}">
-                <a16:creationId xmlns:a16="http://schemas.microsoft.com/office/drawing/2014/main" id="{70B16B3B-F153-B5DB-3173-FA0048C1618F}"/>
-              </a:ext>
-            </a:extLst>
-          </p:cNvPr>
-          <p:cNvPicPr>
-            <a:picLocks noChangeAspect="1"/>
-          </p:cNvPicPr>
-          <p:nvPr/>
-        </p:nvPicPr>
-        <p:blipFill>
-          <a:blip r:embed="rId2"/>
-          <a:stretch>
-            <a:fillRect/>
-          </a:stretch>
-        </p:blipFill>
-        <p:spPr>
-          <a:xfrm>
-            <a:off x="4155416" y="2475751"/>
-            <a:ext cx="4096322" cy="2934109"/>
-          </a:xfrm>
-          <a:prstGeom prst="rect">
-            <a:avLst/>
-          </a:prstGeom>
-        </p:spPr>
-      </p:pic>
-    </p:spTree>
-    <p:extLst>
-      <p:ext uri="{BB962C8B-B14F-4D97-AF65-F5344CB8AC3E}">
-        <p14:creationId xmlns:p14="http://schemas.microsoft.com/office/powerpoint/2010/main" val="1550932351"/>
       </p:ext>
     </p:extLst>
   </p:cSld>

--- a/Resources-Notes-Ppts/React/React.pptx
+++ b/Resources-Notes-Ppts/React/React.pptx
@@ -24725,7 +24725,7 @@
         <p:spPr>
           <a:xfrm>
             <a:off x="1562100" y="1968500"/>
-            <a:ext cx="1696298" cy="369332"/>
+            <a:ext cx="1556836" cy="369332"/>
           </a:xfrm>
           <a:prstGeom prst="rect">
             <a:avLst/>
@@ -24740,7 +24740,7 @@
           <a:p>
             <a:r>
               <a:rPr lang="en-US" dirty="0" err="1"/>
-              <a:t>UserAccount.ts</a:t>
+              <a:t>useAccount.ts</a:t>
             </a:r>
             <a:r>
               <a:rPr lang="en-US" dirty="0"/>
@@ -24908,10 +24908,10 @@
       </p:sp>
       <p:pic>
         <p:nvPicPr>
-          <p:cNvPr id="13" name="Picture 12">
-            <a:extLst>
-              <a:ext uri="{FF2B5EF4-FFF2-40B4-BE49-F238E27FC236}">
-                <a16:creationId xmlns:a16="http://schemas.microsoft.com/office/drawing/2014/main" id="{494330EA-F2BC-680B-6B32-041C6743E56D}"/>
+          <p:cNvPr id="17" name="Picture 16">
+            <a:extLst>
+              <a:ext uri="{FF2B5EF4-FFF2-40B4-BE49-F238E27FC236}">
+                <a16:creationId xmlns:a16="http://schemas.microsoft.com/office/drawing/2014/main" id="{FFBD4BE1-EB7B-7D7E-6174-8C2C598C6375}"/>
               </a:ext>
             </a:extLst>
           </p:cNvPr>
@@ -24928,8 +24928,8 @@
         </p:blipFill>
         <p:spPr>
           <a:xfrm>
-            <a:off x="890771" y="2309339"/>
-            <a:ext cx="4024130" cy="4388710"/>
+            <a:off x="746877" y="2337832"/>
+            <a:ext cx="3994316" cy="4252227"/>
           </a:xfrm>
           <a:prstGeom prst="rect">
             <a:avLst/>
